--- a/Presentations/Department_presentation/presentation_slides.pptx
+++ b/Presentations/Department_presentation/presentation_slides.pptx
@@ -3909,7 +3909,7 @@
           <a:p>
             <a:fld id="{584B93E9-1225-3240-BFB8-F6BE441294EC}" type="datetimeFigureOut">
               <a:rPr lang="en-US" smtClean="0"/>
-              <a:t>9/25/25</a:t>
+              <a:t>11/3/25</a:t>
             </a:fld>
             <a:endParaRPr lang="en-US"/>
           </a:p>
@@ -5690,14 +5690,6 @@
           <a:bodyPr/>
           <a:lstStyle/>
           <a:p>
-            <a:r>
-              <a:rPr lang="en-US" dirty="0"/>
-              <a:t>Remove </a:t>
-            </a:r>
-            <a:r>
-              <a:rPr lang="en-US" dirty="0" err="1"/>
-              <a:t>Angleed</a:t>
-            </a:r>
             <a:endParaRPr lang="en-US" dirty="0"/>
           </a:p>
         </p:txBody>
@@ -6107,7 +6099,7 @@
           <a:p>
             <a:fld id="{9F9F4EB1-1D6D-334B-9807-69A55474CB50}" type="datetimeFigureOut">
               <a:rPr lang="en-US" smtClean="0"/>
-              <a:t>9/25/25</a:t>
+              <a:t>11/3/25</a:t>
             </a:fld>
             <a:endParaRPr lang="en-US"/>
           </a:p>
@@ -6305,7 +6297,7 @@
           <a:p>
             <a:fld id="{9F9F4EB1-1D6D-334B-9807-69A55474CB50}" type="datetimeFigureOut">
               <a:rPr lang="en-US" smtClean="0"/>
-              <a:t>9/25/25</a:t>
+              <a:t>11/3/25</a:t>
             </a:fld>
             <a:endParaRPr lang="en-US"/>
           </a:p>
@@ -6513,7 +6505,7 @@
           <a:p>
             <a:fld id="{9F9F4EB1-1D6D-334B-9807-69A55474CB50}" type="datetimeFigureOut">
               <a:rPr lang="en-US" smtClean="0"/>
-              <a:t>9/25/25</a:t>
+              <a:t>11/3/25</a:t>
             </a:fld>
             <a:endParaRPr lang="en-US"/>
           </a:p>
@@ -6711,7 +6703,7 @@
           <a:p>
             <a:fld id="{9F9F4EB1-1D6D-334B-9807-69A55474CB50}" type="datetimeFigureOut">
               <a:rPr lang="en-US" smtClean="0"/>
-              <a:t>9/25/25</a:t>
+              <a:t>11/3/25</a:t>
             </a:fld>
             <a:endParaRPr lang="en-US"/>
           </a:p>
@@ -6986,7 +6978,7 @@
           <a:p>
             <a:fld id="{9F9F4EB1-1D6D-334B-9807-69A55474CB50}" type="datetimeFigureOut">
               <a:rPr lang="en-US" smtClean="0"/>
-              <a:t>9/25/25</a:t>
+              <a:t>11/3/25</a:t>
             </a:fld>
             <a:endParaRPr lang="en-US"/>
           </a:p>
@@ -7251,7 +7243,7 @@
           <a:p>
             <a:fld id="{9F9F4EB1-1D6D-334B-9807-69A55474CB50}" type="datetimeFigureOut">
               <a:rPr lang="en-US" smtClean="0"/>
-              <a:t>9/25/25</a:t>
+              <a:t>11/3/25</a:t>
             </a:fld>
             <a:endParaRPr lang="en-US"/>
           </a:p>
@@ -7663,7 +7655,7 @@
           <a:p>
             <a:fld id="{9F9F4EB1-1D6D-334B-9807-69A55474CB50}" type="datetimeFigureOut">
               <a:rPr lang="en-US" smtClean="0"/>
-              <a:t>9/25/25</a:t>
+              <a:t>11/3/25</a:t>
             </a:fld>
             <a:endParaRPr lang="en-US"/>
           </a:p>
@@ -7804,7 +7796,7 @@
           <a:p>
             <a:fld id="{9F9F4EB1-1D6D-334B-9807-69A55474CB50}" type="datetimeFigureOut">
               <a:rPr lang="en-US" smtClean="0"/>
-              <a:t>9/25/25</a:t>
+              <a:t>11/3/25</a:t>
             </a:fld>
             <a:endParaRPr lang="en-US"/>
           </a:p>
@@ -7917,7 +7909,7 @@
           <a:p>
             <a:fld id="{9F9F4EB1-1D6D-334B-9807-69A55474CB50}" type="datetimeFigureOut">
               <a:rPr lang="en-US" smtClean="0"/>
-              <a:t>9/25/25</a:t>
+              <a:t>11/3/25</a:t>
             </a:fld>
             <a:endParaRPr lang="en-US"/>
           </a:p>
@@ -8228,7 +8220,7 @@
           <a:p>
             <a:fld id="{9F9F4EB1-1D6D-334B-9807-69A55474CB50}" type="datetimeFigureOut">
               <a:rPr lang="en-US" smtClean="0"/>
-              <a:t>9/25/25</a:t>
+              <a:t>11/3/25</a:t>
             </a:fld>
             <a:endParaRPr lang="en-US"/>
           </a:p>
@@ -8516,7 +8508,7 @@
           <a:p>
             <a:fld id="{9F9F4EB1-1D6D-334B-9807-69A55474CB50}" type="datetimeFigureOut">
               <a:rPr lang="en-US" smtClean="0"/>
-              <a:t>9/25/25</a:t>
+              <a:t>11/3/25</a:t>
             </a:fld>
             <a:endParaRPr lang="en-US"/>
           </a:p>
@@ -8757,7 +8749,7 @@
           <a:p>
             <a:fld id="{9F9F4EB1-1D6D-334B-9807-69A55474CB50}" type="datetimeFigureOut">
               <a:rPr lang="en-US" smtClean="0"/>
-              <a:t>9/25/25</a:t>
+              <a:t>11/3/25</a:t>
             </a:fld>
             <a:endParaRPr lang="en-US"/>
           </a:p>
@@ -13052,8 +13044,8 @@
           </a:p>
         </p:txBody>
       </p:sp>
-      <mc:AlternateContent xmlns:mc="http://schemas.openxmlformats.org/markup-compatibility/2006">
-        <mc:Choice xmlns:a14="http://schemas.microsoft.com/office/drawing/2010/main" Requires="a14">
+      <mc:AlternateContent xmlns:mc="http://schemas.openxmlformats.org/markup-compatibility/2006" xmlns:a14="http://schemas.microsoft.com/office/drawing/2010/main">
+        <mc:Choice Requires="a14">
           <p:sp>
             <p:nvSpPr>
               <p:cNvPr id="18" name="Content Placeholder 2">
@@ -13389,7 +13381,7 @@
             </p:txBody>
           </p:sp>
         </mc:Choice>
-        <mc:Fallback>
+        <mc:Fallback xmlns="">
           <p:sp>
             <p:nvSpPr>
               <p:cNvPr id="18" name="Content Placeholder 2">
@@ -15911,8 +15903,8 @@
           </a:p>
         </p:txBody>
       </p:sp>
-      <mc:AlternateContent xmlns:mc="http://schemas.openxmlformats.org/markup-compatibility/2006">
-        <mc:Choice xmlns:a14="http://schemas.microsoft.com/office/drawing/2010/main" Requires="a14">
+      <mc:AlternateContent xmlns:mc="http://schemas.openxmlformats.org/markup-compatibility/2006" xmlns:a14="http://schemas.microsoft.com/office/drawing/2010/main">
+        <mc:Choice Requires="a14">
           <p:sp>
             <p:nvSpPr>
               <p:cNvPr id="13" name="Content Placeholder 2">
@@ -16167,7 +16159,7 @@
             </p:txBody>
           </p:sp>
         </mc:Choice>
-        <mc:Fallback>
+        <mc:Fallback xmlns="">
           <p:sp>
             <p:nvSpPr>
               <p:cNvPr id="13" name="Content Placeholder 2">
@@ -20044,8 +20036,8 @@
           </a:fontRef>
         </p:style>
       </p:cxnSp>
-      <mc:AlternateContent xmlns:mc="http://schemas.openxmlformats.org/markup-compatibility/2006">
-        <mc:Choice xmlns:a14="http://schemas.microsoft.com/office/drawing/2010/main" Requires="a14">
+      <mc:AlternateContent xmlns:mc="http://schemas.openxmlformats.org/markup-compatibility/2006" xmlns:a14="http://schemas.microsoft.com/office/drawing/2010/main">
+        <mc:Choice Requires="a14">
           <p:sp>
             <p:nvSpPr>
               <p:cNvPr id="89" name="TextBox 88">
@@ -20074,6 +20066,7 @@
               </a:bodyPr>
               <a:lstStyle/>
               <a:p>
+                <a:pPr/>
                 <a14:m>
                   <m:oMathPara xmlns:m="http://schemas.openxmlformats.org/officeDocument/2006/math">
                     <m:oMathParaPr>
@@ -20166,7 +20159,7 @@
             </p:txBody>
           </p:sp>
         </mc:Choice>
-        <mc:Fallback>
+        <mc:Fallback xmlns="">
           <p:sp>
             <p:nvSpPr>
               <p:cNvPr id="89" name="TextBox 88">
@@ -20211,8 +20204,8 @@
           </p:sp>
         </mc:Fallback>
       </mc:AlternateContent>
-      <mc:AlternateContent xmlns:mc="http://schemas.openxmlformats.org/markup-compatibility/2006">
-        <mc:Choice xmlns:a14="http://schemas.microsoft.com/office/drawing/2010/main" Requires="a14">
+      <mc:AlternateContent xmlns:mc="http://schemas.openxmlformats.org/markup-compatibility/2006" xmlns:a14="http://schemas.microsoft.com/office/drawing/2010/main">
+        <mc:Choice Requires="a14">
           <p:sp>
             <p:nvSpPr>
               <p:cNvPr id="90" name="TextBox 89">
@@ -20241,6 +20234,7 @@
               </a:bodyPr>
               <a:lstStyle/>
               <a:p>
+                <a:pPr/>
                 <a14:m>
                   <m:oMathPara xmlns:m="http://schemas.openxmlformats.org/officeDocument/2006/math">
                     <m:oMathParaPr>
@@ -20333,7 +20327,7 @@
             </p:txBody>
           </p:sp>
         </mc:Choice>
-        <mc:Fallback>
+        <mc:Fallback xmlns="">
           <p:sp>
             <p:nvSpPr>
               <p:cNvPr id="90" name="TextBox 89">
@@ -27160,8 +27154,8 @@
           <a:chExt cx="0" cy="0"/>
         </a:xfrm>
       </p:grpSpPr>
-      <mc:AlternateContent xmlns:mc="http://schemas.openxmlformats.org/markup-compatibility/2006">
-        <mc:Choice xmlns:a14="http://schemas.microsoft.com/office/drawing/2010/main" Requires="a14">
+      <mc:AlternateContent xmlns:mc="http://schemas.openxmlformats.org/markup-compatibility/2006" xmlns:a14="http://schemas.microsoft.com/office/drawing/2010/main">
+        <mc:Choice Requires="a14">
           <p:sp>
             <p:nvSpPr>
               <p:cNvPr id="17" name="Content Placeholder 2">
@@ -27477,7 +27471,7 @@
             </p:txBody>
           </p:sp>
         </mc:Choice>
-        <mc:Fallback>
+        <mc:Fallback xmlns="">
           <p:sp>
             <p:nvSpPr>
               <p:cNvPr id="17" name="Content Placeholder 2">
@@ -28034,8 +28028,8 @@
           </a:p>
         </p:txBody>
       </p:sp>
-      <mc:AlternateContent xmlns:mc="http://schemas.openxmlformats.org/markup-compatibility/2006">
-        <mc:Choice xmlns:a14="http://schemas.microsoft.com/office/drawing/2010/main" Requires="a14">
+      <mc:AlternateContent xmlns:mc="http://schemas.openxmlformats.org/markup-compatibility/2006" xmlns:a14="http://schemas.microsoft.com/office/drawing/2010/main">
+        <mc:Choice Requires="a14">
           <p:sp>
             <p:nvSpPr>
               <p:cNvPr id="3" name="Content Placeholder 2">
@@ -28190,7 +28184,7 @@
             </p:txBody>
           </p:sp>
         </mc:Choice>
-        <mc:Fallback>
+        <mc:Fallback xmlns="">
           <p:sp>
             <p:nvSpPr>
               <p:cNvPr id="3" name="Content Placeholder 2">
@@ -30981,8 +30975,8 @@
           </a:p>
         </p:txBody>
       </p:sp>
-      <mc:AlternateContent xmlns:mc="http://schemas.openxmlformats.org/markup-compatibility/2006">
-        <mc:Choice xmlns:a14="http://schemas.microsoft.com/office/drawing/2010/main" Requires="a14">
+      <mc:AlternateContent xmlns:mc="http://schemas.openxmlformats.org/markup-compatibility/2006" xmlns:a14="http://schemas.microsoft.com/office/drawing/2010/main">
+        <mc:Choice Requires="a14">
           <p:sp>
             <p:nvSpPr>
               <p:cNvPr id="23" name="Content Placeholder 8">
@@ -31365,7 +31359,7 @@
             </p:txBody>
           </p:sp>
         </mc:Choice>
-        <mc:Fallback>
+        <mc:Fallback xmlns="">
           <p:sp>
             <p:nvSpPr>
               <p:cNvPr id="23" name="Content Placeholder 8">
@@ -31882,8 +31876,8 @@
           </a:p>
         </p:txBody>
       </p:sp>
-      <mc:AlternateContent xmlns:mc="http://schemas.openxmlformats.org/markup-compatibility/2006">
-        <mc:Choice xmlns:a14="http://schemas.microsoft.com/office/drawing/2010/main" Requires="a14">
+      <mc:AlternateContent xmlns:mc="http://schemas.openxmlformats.org/markup-compatibility/2006" xmlns:a14="http://schemas.microsoft.com/office/drawing/2010/main">
+        <mc:Choice Requires="a14">
           <p:sp>
             <p:nvSpPr>
               <p:cNvPr id="42" name="TextBox 41">
@@ -31912,6 +31906,7 @@
               </a:bodyPr>
               <a:lstStyle/>
               <a:p>
+                <a:pPr/>
                 <a14:m>
                   <m:oMathPara xmlns:m="http://schemas.openxmlformats.org/officeDocument/2006/math">
                     <m:oMathParaPr>
@@ -31933,7 +31928,7 @@
             </p:txBody>
           </p:sp>
         </mc:Choice>
-        <mc:Fallback>
+        <mc:Fallback xmlns="">
           <p:sp>
             <p:nvSpPr>
               <p:cNvPr id="42" name="TextBox 41">
@@ -31978,8 +31973,8 @@
           </p:sp>
         </mc:Fallback>
       </mc:AlternateContent>
-      <mc:AlternateContent xmlns:mc="http://schemas.openxmlformats.org/markup-compatibility/2006">
-        <mc:Choice xmlns:a14="http://schemas.microsoft.com/office/drawing/2010/main" Requires="a14">
+      <mc:AlternateContent xmlns:mc="http://schemas.openxmlformats.org/markup-compatibility/2006" xmlns:a14="http://schemas.microsoft.com/office/drawing/2010/main">
+        <mc:Choice Requires="a14">
           <p:sp>
             <p:nvSpPr>
               <p:cNvPr id="43" name="TextBox 42">
@@ -32008,6 +32003,7 @@
               </a:bodyPr>
               <a:lstStyle/>
               <a:p>
+                <a:pPr/>
                 <a14:m>
                   <m:oMathPara xmlns:m="http://schemas.openxmlformats.org/officeDocument/2006/math">
                     <m:oMathParaPr>
@@ -32029,7 +32025,7 @@
             </p:txBody>
           </p:sp>
         </mc:Choice>
-        <mc:Fallback>
+        <mc:Fallback xmlns="">
           <p:sp>
             <p:nvSpPr>
               <p:cNvPr id="43" name="TextBox 42">
@@ -32535,8 +32531,8 @@
           </a:p>
         </p:txBody>
       </p:sp>
-      <mc:AlternateContent xmlns:mc="http://schemas.openxmlformats.org/markup-compatibility/2006">
-        <mc:Choice xmlns:a14="http://schemas.microsoft.com/office/drawing/2010/main" Requires="a14">
+      <mc:AlternateContent xmlns:mc="http://schemas.openxmlformats.org/markup-compatibility/2006" xmlns:a14="http://schemas.microsoft.com/office/drawing/2010/main">
+        <mc:Choice Requires="a14">
           <p:sp>
             <p:nvSpPr>
               <p:cNvPr id="54" name="TextBox 53">
@@ -32565,6 +32561,7 @@
               </a:bodyPr>
               <a:lstStyle/>
               <a:p>
+                <a:pPr/>
                 <a14:m>
                   <m:oMathPara xmlns:m="http://schemas.openxmlformats.org/officeDocument/2006/math">
                     <m:oMathParaPr>
@@ -32586,7 +32583,7 @@
             </p:txBody>
           </p:sp>
         </mc:Choice>
-        <mc:Fallback>
+        <mc:Fallback xmlns="">
           <p:sp>
             <p:nvSpPr>
               <p:cNvPr id="54" name="TextBox 53">
@@ -32714,8 +32711,8 @@
           </a:p>
         </p:txBody>
       </p:sp>
-      <mc:AlternateContent xmlns:mc="http://schemas.openxmlformats.org/markup-compatibility/2006">
-        <mc:Choice xmlns:a14="http://schemas.microsoft.com/office/drawing/2010/main" Requires="a14">
+      <mc:AlternateContent xmlns:mc="http://schemas.openxmlformats.org/markup-compatibility/2006" xmlns:a14="http://schemas.microsoft.com/office/drawing/2010/main">
+        <mc:Choice Requires="a14">
           <p:sp>
             <p:nvSpPr>
               <p:cNvPr id="57" name="TextBox 56">
@@ -32744,6 +32741,7 @@
               </a:bodyPr>
               <a:lstStyle/>
               <a:p>
+                <a:pPr/>
                 <a14:m>
                   <m:oMathPara xmlns:m="http://schemas.openxmlformats.org/officeDocument/2006/math">
                     <m:oMathParaPr>
@@ -32765,7 +32763,7 @@
             </p:txBody>
           </p:sp>
         </mc:Choice>
-        <mc:Fallback>
+        <mc:Fallback xmlns="">
           <p:sp>
             <p:nvSpPr>
               <p:cNvPr id="57" name="TextBox 56">
@@ -32893,8 +32891,8 @@
           </a:p>
         </p:txBody>
       </p:sp>
-      <mc:AlternateContent xmlns:mc="http://schemas.openxmlformats.org/markup-compatibility/2006">
-        <mc:Choice xmlns:a14="http://schemas.microsoft.com/office/drawing/2010/main" Requires="a14">
+      <mc:AlternateContent xmlns:mc="http://schemas.openxmlformats.org/markup-compatibility/2006" xmlns:a14="http://schemas.microsoft.com/office/drawing/2010/main">
+        <mc:Choice Requires="a14">
           <p:sp>
             <p:nvSpPr>
               <p:cNvPr id="60" name="TextBox 59">
@@ -32923,6 +32921,7 @@
               </a:bodyPr>
               <a:lstStyle/>
               <a:p>
+                <a:pPr/>
                 <a14:m>
                   <m:oMathPara xmlns:m="http://schemas.openxmlformats.org/officeDocument/2006/math">
                     <m:oMathParaPr>
@@ -32944,7 +32943,7 @@
             </p:txBody>
           </p:sp>
         </mc:Choice>
-        <mc:Fallback>
+        <mc:Fallback xmlns="">
           <p:sp>
             <p:nvSpPr>
               <p:cNvPr id="60" name="TextBox 59">
